--- a/Living Hope_chords.pptx
+++ b/Living Hope_chords.pptx
@@ -12,11 +12,8 @@
     <p:sldId id="287" r:id="rId6"/>
     <p:sldId id="276" r:id="rId7"/>
     <p:sldId id="289" r:id="rId8"/>
-    <p:sldId id="290" r:id="rId9"/>
-    <p:sldId id="291" r:id="rId10"/>
-    <p:sldId id="292" r:id="rId11"/>
-    <p:sldId id="293" r:id="rId12"/>
-    <p:sldId id="295" r:id="rId13"/>
+    <p:sldId id="296" r:id="rId9"/>
+    <p:sldId id="295" r:id="rId10"/>
   </p:sldIdLst>
   <p:sldSz cx="12192000" cy="6858000"/>
   <p:notesSz cx="6858000" cy="9144000"/>
@@ -270,7 +267,7 @@
           <a:p>
             <a:fld id="{E759A0DE-F190-5444-87AC-4719D5F20D15}" type="datetimeFigureOut">
               <a:rPr lang="en-US" smtClean="0"/>
-              <a:t>3/31/26</a:t>
+              <a:t>4/3/26</a:t>
             </a:fld>
             <a:endParaRPr lang="en-US"/>
           </a:p>
@@ -468,7 +465,7 @@
           <a:p>
             <a:fld id="{E759A0DE-F190-5444-87AC-4719D5F20D15}" type="datetimeFigureOut">
               <a:rPr lang="en-US" smtClean="0"/>
-              <a:t>3/31/26</a:t>
+              <a:t>4/3/26</a:t>
             </a:fld>
             <a:endParaRPr lang="en-US"/>
           </a:p>
@@ -676,7 +673,7 @@
           <a:p>
             <a:fld id="{E759A0DE-F190-5444-87AC-4719D5F20D15}" type="datetimeFigureOut">
               <a:rPr lang="en-US" smtClean="0"/>
-              <a:t>3/31/26</a:t>
+              <a:t>4/3/26</a:t>
             </a:fld>
             <a:endParaRPr lang="en-US"/>
           </a:p>
@@ -874,7 +871,7 @@
           <a:p>
             <a:fld id="{E759A0DE-F190-5444-87AC-4719D5F20D15}" type="datetimeFigureOut">
               <a:rPr lang="en-US" smtClean="0"/>
-              <a:t>3/31/26</a:t>
+              <a:t>4/3/26</a:t>
             </a:fld>
             <a:endParaRPr lang="en-US"/>
           </a:p>
@@ -1149,7 +1146,7 @@
           <a:p>
             <a:fld id="{E759A0DE-F190-5444-87AC-4719D5F20D15}" type="datetimeFigureOut">
               <a:rPr lang="en-US" smtClean="0"/>
-              <a:t>3/31/26</a:t>
+              <a:t>4/3/26</a:t>
             </a:fld>
             <a:endParaRPr lang="en-US"/>
           </a:p>
@@ -1414,7 +1411,7 @@
           <a:p>
             <a:fld id="{E759A0DE-F190-5444-87AC-4719D5F20D15}" type="datetimeFigureOut">
               <a:rPr lang="en-US" smtClean="0"/>
-              <a:t>3/31/26</a:t>
+              <a:t>4/3/26</a:t>
             </a:fld>
             <a:endParaRPr lang="en-US"/>
           </a:p>
@@ -1826,7 +1823,7 @@
           <a:p>
             <a:fld id="{E759A0DE-F190-5444-87AC-4719D5F20D15}" type="datetimeFigureOut">
               <a:rPr lang="en-US" smtClean="0"/>
-              <a:t>3/31/26</a:t>
+              <a:t>4/3/26</a:t>
             </a:fld>
             <a:endParaRPr lang="en-US"/>
           </a:p>
@@ -1967,7 +1964,7 @@
           <a:p>
             <a:fld id="{E759A0DE-F190-5444-87AC-4719D5F20D15}" type="datetimeFigureOut">
               <a:rPr lang="en-US" smtClean="0"/>
-              <a:t>3/31/26</a:t>
+              <a:t>4/3/26</a:t>
             </a:fld>
             <a:endParaRPr lang="en-US"/>
           </a:p>
@@ -2080,7 +2077,7 @@
           <a:p>
             <a:fld id="{E759A0DE-F190-5444-87AC-4719D5F20D15}" type="datetimeFigureOut">
               <a:rPr lang="en-US" smtClean="0"/>
-              <a:t>3/31/26</a:t>
+              <a:t>4/3/26</a:t>
             </a:fld>
             <a:endParaRPr lang="en-US"/>
           </a:p>
@@ -2391,7 +2388,7 @@
           <a:p>
             <a:fld id="{E759A0DE-F190-5444-87AC-4719D5F20D15}" type="datetimeFigureOut">
               <a:rPr lang="en-US" smtClean="0"/>
-              <a:t>3/31/26</a:t>
+              <a:t>4/3/26</a:t>
             </a:fld>
             <a:endParaRPr lang="en-US"/>
           </a:p>
@@ -2679,7 +2676,7 @@
           <a:p>
             <a:fld id="{E759A0DE-F190-5444-87AC-4719D5F20D15}" type="datetimeFigureOut">
               <a:rPr lang="en-US" smtClean="0"/>
-              <a:t>3/31/26</a:t>
+              <a:t>4/3/26</a:t>
             </a:fld>
             <a:endParaRPr lang="en-US"/>
           </a:p>
@@ -2920,7 +2917,7 @@
           <a:p>
             <a:fld id="{E759A0DE-F190-5444-87AC-4719D5F20D15}" type="datetimeFigureOut">
               <a:rPr lang="en-US" smtClean="0"/>
-              <a:t>3/31/26</a:t>
+              <a:t>4/3/26</a:t>
             </a:fld>
             <a:endParaRPr lang="en-US"/>
           </a:p>
@@ -3842,415 +3839,6 @@
 </p:sld>
 </file>
 
-<file path=ppt/slides/slide10.xml><?xml version="1.0" encoding="utf-8"?>
-<p:sld xmlns:a="http://schemas.openxmlformats.org/drawingml/2006/main" xmlns:r="http://schemas.openxmlformats.org/officeDocument/2006/relationships" xmlns:p="http://schemas.openxmlformats.org/presentationml/2006/main">
-  <p:cSld>
-    <p:bg>
-      <p:bgPr>
-        <a:solidFill>
-          <a:schemeClr val="accent1"/>
-        </a:solidFill>
-        <a:effectLst/>
-      </p:bgPr>
-    </p:bg>
-    <p:spTree>
-      <p:nvGrpSpPr>
-        <p:cNvPr id="1" name="">
-          <a:extLst>
-            <a:ext uri="{FF2B5EF4-FFF2-40B4-BE49-F238E27FC236}">
-              <a16:creationId xmlns:a16="http://schemas.microsoft.com/office/drawing/2014/main" id="{EDAAC288-0C96-727C-1C25-C731C1001F9A}"/>
-            </a:ext>
-          </a:extLst>
-        </p:cNvPr>
-        <p:cNvGrpSpPr/>
-        <p:nvPr/>
-      </p:nvGrpSpPr>
-      <p:grpSpPr>
-        <a:xfrm>
-          <a:off x="0" y="0"/>
-          <a:ext cx="0" cy="0"/>
-          <a:chOff x="0" y="0"/>
-          <a:chExt cx="0" cy="0"/>
-        </a:xfrm>
-      </p:grpSpPr>
-      <p:sp>
-        <p:nvSpPr>
-          <p:cNvPr id="3" name="Subtitle 2">
-            <a:extLst>
-              <a:ext uri="{FF2B5EF4-FFF2-40B4-BE49-F238E27FC236}">
-                <a16:creationId xmlns:a16="http://schemas.microsoft.com/office/drawing/2014/main" id="{166560BE-DFD9-2F84-282E-C87B22BC2637}"/>
-              </a:ext>
-            </a:extLst>
-          </p:cNvPr>
-          <p:cNvSpPr>
-            <a:spLocks noGrp="1"/>
-          </p:cNvSpPr>
-          <p:nvPr>
-            <p:ph type="subTitle" idx="1"/>
-          </p:nvPr>
-        </p:nvSpPr>
-        <p:spPr>
-          <a:xfrm>
-            <a:off x="682831" y="497702"/>
-            <a:ext cx="10826338" cy="5862596"/>
-          </a:xfrm>
-        </p:spPr>
-        <p:txBody>
-          <a:bodyPr>
-            <a:noAutofit/>
-          </a:bodyPr>
-          <a:lstStyle/>
-          <a:p>
-            <a:endParaRPr lang="en-US" sz="4400" dirty="0">
-              <a:solidFill>
-                <a:schemeClr val="bg1"/>
-              </a:solidFill>
-              <a:latin typeface="Avenir Medium" panose="02000503020000020003" pitchFamily="2" charset="0"/>
-              <a:ea typeface="Bodoni Ornaments" pitchFamily="2" charset="0"/>
-            </a:endParaRPr>
-          </a:p>
-          <a:p>
-            <a:endParaRPr lang="en-US" sz="4400" dirty="0">
-              <a:solidFill>
-                <a:schemeClr val="bg1"/>
-              </a:solidFill>
-              <a:latin typeface="Avenir Medium" panose="02000503020000020003" pitchFamily="2" charset="0"/>
-              <a:ea typeface="Bodoni Ornaments" pitchFamily="2" charset="0"/>
-            </a:endParaRPr>
-          </a:p>
-          <a:p>
-            <a:r>
-              <a:rPr lang="en-US" sz="4400" dirty="0">
-                <a:solidFill>
-                  <a:schemeClr val="bg1"/>
-                </a:solidFill>
-                <a:latin typeface="Avenir Medium" panose="02000503020000020003" pitchFamily="2" charset="0"/>
-                <a:ea typeface="Bodoni Ornaments" pitchFamily="2" charset="0"/>
-              </a:rPr>
-              <a:t>Out of the silence, the Roaring Lion</a:t>
-            </a:r>
-          </a:p>
-          <a:p>
-            <a:r>
-              <a:rPr lang="en-US" sz="4400" dirty="0">
-                <a:solidFill>
-                  <a:schemeClr val="bg1"/>
-                </a:solidFill>
-                <a:latin typeface="Avenir Medium" panose="02000503020000020003" pitchFamily="2" charset="0"/>
-                <a:ea typeface="Bodoni Ornaments" pitchFamily="2" charset="0"/>
-              </a:rPr>
-              <a:t>Declared the grave has no claim on me</a:t>
-            </a:r>
-          </a:p>
-          <a:p>
-            <a:endParaRPr lang="en-US" sz="4400" dirty="0">
-              <a:solidFill>
-                <a:schemeClr val="bg1"/>
-              </a:solidFill>
-              <a:latin typeface="Avenir Medium" panose="02000503020000020003" pitchFamily="2" charset="0"/>
-              <a:ea typeface="Bodoni Ornaments" pitchFamily="2" charset="0"/>
-            </a:endParaRPr>
-          </a:p>
-          <a:p>
-            <a:r>
-              <a:rPr lang="en-US" sz="4400" dirty="0">
-                <a:solidFill>
-                  <a:schemeClr val="bg1"/>
-                </a:solidFill>
-                <a:latin typeface="Avenir Medium" panose="02000503020000020003" pitchFamily="2" charset="0"/>
-                <a:ea typeface="Bodoni Ornaments" pitchFamily="2" charset="0"/>
-              </a:rPr>
-              <a:t>Jesus, Yours is the victory</a:t>
-            </a:r>
-          </a:p>
-        </p:txBody>
-      </p:sp>
-    </p:spTree>
-    <p:extLst>
-      <p:ext uri="{BB962C8B-B14F-4D97-AF65-F5344CB8AC3E}">
-        <p14:creationId xmlns:p14="http://schemas.microsoft.com/office/powerpoint/2010/main" val="1401643605"/>
-      </p:ext>
-    </p:extLst>
-  </p:cSld>
-  <p:clrMapOvr>
-    <a:masterClrMapping/>
-  </p:clrMapOvr>
-</p:sld>
-</file>
-
-<file path=ppt/slides/slide11.xml><?xml version="1.0" encoding="utf-8"?>
-<p:sld xmlns:a="http://schemas.openxmlformats.org/drawingml/2006/main" xmlns:r="http://schemas.openxmlformats.org/officeDocument/2006/relationships" xmlns:p="http://schemas.openxmlformats.org/presentationml/2006/main">
-  <p:cSld>
-    <p:bg>
-      <p:bgPr>
-        <a:solidFill>
-          <a:schemeClr val="accent5">
-            <a:lumMod val="50000"/>
-          </a:schemeClr>
-        </a:solidFill>
-        <a:effectLst/>
-      </p:bgPr>
-    </p:bg>
-    <p:spTree>
-      <p:nvGrpSpPr>
-        <p:cNvPr id="1" name="">
-          <a:extLst>
-            <a:ext uri="{FF2B5EF4-FFF2-40B4-BE49-F238E27FC236}">
-              <a16:creationId xmlns:a16="http://schemas.microsoft.com/office/drawing/2014/main" id="{1942DA16-AD5D-275D-B36E-EEDFB3EB6548}"/>
-            </a:ext>
-          </a:extLst>
-        </p:cNvPr>
-        <p:cNvGrpSpPr/>
-        <p:nvPr/>
-      </p:nvGrpSpPr>
-      <p:grpSpPr>
-        <a:xfrm>
-          <a:off x="0" y="0"/>
-          <a:ext cx="0" cy="0"/>
-          <a:chOff x="0" y="0"/>
-          <a:chExt cx="0" cy="0"/>
-        </a:xfrm>
-      </p:grpSpPr>
-      <p:sp>
-        <p:nvSpPr>
-          <p:cNvPr id="3" name="Subtitle 2">
-            <a:extLst>
-              <a:ext uri="{FF2B5EF4-FFF2-40B4-BE49-F238E27FC236}">
-                <a16:creationId xmlns:a16="http://schemas.microsoft.com/office/drawing/2014/main" id="{F350F34E-29FB-F982-B18F-849781E4326E}"/>
-              </a:ext>
-            </a:extLst>
-          </p:cNvPr>
-          <p:cNvSpPr>
-            <a:spLocks noGrp="1"/>
-          </p:cNvSpPr>
-          <p:nvPr>
-            <p:ph type="subTitle" idx="1"/>
-          </p:nvPr>
-        </p:nvSpPr>
-        <p:spPr>
-          <a:xfrm>
-            <a:off x="682831" y="497702"/>
-            <a:ext cx="10826338" cy="5862596"/>
-          </a:xfrm>
-        </p:spPr>
-        <p:txBody>
-          <a:bodyPr>
-            <a:noAutofit/>
-          </a:bodyPr>
-          <a:lstStyle/>
-          <a:p>
-            <a:endParaRPr lang="en-US" sz="4400" dirty="0">
-              <a:solidFill>
-                <a:schemeClr val="bg1"/>
-              </a:solidFill>
-              <a:latin typeface="Avenir Medium" panose="02000503020000020003" pitchFamily="2" charset="0"/>
-              <a:ea typeface="Bodoni Ornaments" pitchFamily="2" charset="0"/>
-            </a:endParaRPr>
-          </a:p>
-          <a:p>
-            <a:r>
-              <a:rPr lang="en-US" sz="4400" dirty="0">
-                <a:solidFill>
-                  <a:schemeClr val="bg1"/>
-                </a:solidFill>
-                <a:latin typeface="Avenir Medium" panose="02000503020000020003" pitchFamily="2" charset="0"/>
-                <a:ea typeface="Bodoni Ornaments" pitchFamily="2" charset="0"/>
-              </a:rPr>
-              <a:t>Hallelujah, praise the One </a:t>
-            </a:r>
-          </a:p>
-          <a:p>
-            <a:r>
-              <a:rPr lang="en-US" sz="4400" dirty="0">
-                <a:solidFill>
-                  <a:schemeClr val="bg1"/>
-                </a:solidFill>
-                <a:latin typeface="Avenir Medium" panose="02000503020000020003" pitchFamily="2" charset="0"/>
-                <a:ea typeface="Bodoni Ornaments" pitchFamily="2" charset="0"/>
-              </a:rPr>
-              <a:t>who set me free</a:t>
-            </a:r>
-          </a:p>
-          <a:p>
-            <a:r>
-              <a:rPr lang="en-US" sz="4400" dirty="0">
-                <a:solidFill>
-                  <a:schemeClr val="bg1"/>
-                </a:solidFill>
-                <a:latin typeface="Avenir Medium" panose="02000503020000020003" pitchFamily="2" charset="0"/>
-                <a:ea typeface="Bodoni Ornaments" pitchFamily="2" charset="0"/>
-              </a:rPr>
-              <a:t>Hallelujah, death has lost its grip on me</a:t>
-            </a:r>
-          </a:p>
-          <a:p>
-            <a:r>
-              <a:rPr lang="en-US" sz="4400" dirty="0">
-                <a:solidFill>
-                  <a:schemeClr val="bg1"/>
-                </a:solidFill>
-                <a:latin typeface="Avenir Medium" panose="02000503020000020003" pitchFamily="2" charset="0"/>
-                <a:ea typeface="Bodoni Ornaments" pitchFamily="2" charset="0"/>
-              </a:rPr>
-              <a:t>You have broken every chain</a:t>
-            </a:r>
-          </a:p>
-          <a:p>
-            <a:r>
-              <a:rPr lang="en-US" sz="4400" dirty="0">
-                <a:solidFill>
-                  <a:schemeClr val="bg1"/>
-                </a:solidFill>
-                <a:latin typeface="Avenir Medium" panose="02000503020000020003" pitchFamily="2" charset="0"/>
-                <a:ea typeface="Bodoni Ornaments" pitchFamily="2" charset="0"/>
-              </a:rPr>
-              <a:t>There's salvation in Your name</a:t>
-            </a:r>
-          </a:p>
-          <a:p>
-            <a:r>
-              <a:rPr lang="en-US" sz="4400" dirty="0">
-                <a:solidFill>
-                  <a:schemeClr val="bg1"/>
-                </a:solidFill>
-                <a:latin typeface="Avenir Medium" panose="02000503020000020003" pitchFamily="2" charset="0"/>
-                <a:ea typeface="Bodoni Ornaments" pitchFamily="2" charset="0"/>
-              </a:rPr>
-              <a:t>Jesus Christ, my living hope</a:t>
-            </a:r>
-          </a:p>
-        </p:txBody>
-      </p:sp>
-    </p:spTree>
-    <p:extLst>
-      <p:ext uri="{BB962C8B-B14F-4D97-AF65-F5344CB8AC3E}">
-        <p14:creationId xmlns:p14="http://schemas.microsoft.com/office/powerpoint/2010/main" val="3548000641"/>
-      </p:ext>
-    </p:extLst>
-  </p:cSld>
-  <p:clrMapOvr>
-    <a:masterClrMapping/>
-  </p:clrMapOvr>
-</p:sld>
-</file>
-
-<file path=ppt/slides/slide12.xml><?xml version="1.0" encoding="utf-8"?>
-<p:sld xmlns:a="http://schemas.openxmlformats.org/drawingml/2006/main" xmlns:r="http://schemas.openxmlformats.org/officeDocument/2006/relationships" xmlns:p="http://schemas.openxmlformats.org/presentationml/2006/main">
-  <p:cSld>
-    <p:bg>
-      <p:bgPr>
-        <a:solidFill>
-          <a:schemeClr val="accent5">
-            <a:lumMod val="50000"/>
-          </a:schemeClr>
-        </a:solidFill>
-        <a:effectLst/>
-      </p:bgPr>
-    </p:bg>
-    <p:spTree>
-      <p:nvGrpSpPr>
-        <p:cNvPr id="1" name="">
-          <a:extLst>
-            <a:ext uri="{FF2B5EF4-FFF2-40B4-BE49-F238E27FC236}">
-              <a16:creationId xmlns:a16="http://schemas.microsoft.com/office/drawing/2014/main" id="{FC5F4357-2370-385D-0B57-33EF9E113A9A}"/>
-            </a:ext>
-          </a:extLst>
-        </p:cNvPr>
-        <p:cNvGrpSpPr/>
-        <p:nvPr/>
-      </p:nvGrpSpPr>
-      <p:grpSpPr>
-        <a:xfrm>
-          <a:off x="0" y="0"/>
-          <a:ext cx="0" cy="0"/>
-          <a:chOff x="0" y="0"/>
-          <a:chExt cx="0" cy="0"/>
-        </a:xfrm>
-      </p:grpSpPr>
-      <p:sp>
-        <p:nvSpPr>
-          <p:cNvPr id="3" name="Subtitle 2">
-            <a:extLst>
-              <a:ext uri="{FF2B5EF4-FFF2-40B4-BE49-F238E27FC236}">
-                <a16:creationId xmlns:a16="http://schemas.microsoft.com/office/drawing/2014/main" id="{00EDD212-770A-54CB-55F6-5B869B15EA4F}"/>
-              </a:ext>
-            </a:extLst>
-          </p:cNvPr>
-          <p:cNvSpPr>
-            <a:spLocks noGrp="1"/>
-          </p:cNvSpPr>
-          <p:nvPr>
-            <p:ph type="subTitle" idx="1"/>
-          </p:nvPr>
-        </p:nvSpPr>
-        <p:spPr>
-          <a:xfrm>
-            <a:off x="682831" y="497702"/>
-            <a:ext cx="10826338" cy="5862596"/>
-          </a:xfrm>
-        </p:spPr>
-        <p:txBody>
-          <a:bodyPr>
-            <a:noAutofit/>
-          </a:bodyPr>
-          <a:lstStyle/>
-          <a:p>
-            <a:endParaRPr lang="en-US" sz="4400" dirty="0">
-              <a:solidFill>
-                <a:schemeClr val="bg1"/>
-              </a:solidFill>
-              <a:latin typeface="Avenir Medium" panose="02000503020000020003" pitchFamily="2" charset="0"/>
-              <a:ea typeface="Bodoni Ornaments" pitchFamily="2" charset="0"/>
-            </a:endParaRPr>
-          </a:p>
-          <a:p>
-            <a:endParaRPr lang="en-US" sz="4400" dirty="0">
-              <a:solidFill>
-                <a:schemeClr val="bg1"/>
-              </a:solidFill>
-              <a:latin typeface="Avenir Medium" panose="02000503020000020003" pitchFamily="2" charset="0"/>
-              <a:ea typeface="Bodoni Ornaments" pitchFamily="2" charset="0"/>
-            </a:endParaRPr>
-          </a:p>
-          <a:p>
-            <a:r>
-              <a:rPr lang="en-US" sz="4400" dirty="0">
-                <a:solidFill>
-                  <a:schemeClr val="bg1"/>
-                </a:solidFill>
-                <a:latin typeface="Avenir Medium" panose="02000503020000020003" pitchFamily="2" charset="0"/>
-                <a:ea typeface="Bodoni Ornaments" pitchFamily="2" charset="0"/>
-              </a:rPr>
-              <a:t>Jesus Christ, my living hope</a:t>
-            </a:r>
-          </a:p>
-          <a:p>
-            <a:r>
-              <a:rPr lang="en-US" sz="4400" dirty="0">
-                <a:solidFill>
-                  <a:schemeClr val="bg1"/>
-                </a:solidFill>
-                <a:latin typeface="Avenir Medium" panose="02000503020000020003" pitchFamily="2" charset="0"/>
-                <a:ea typeface="Bodoni Ornaments" pitchFamily="2" charset="0"/>
-              </a:rPr>
-              <a:t>Oh God, You are my living hope</a:t>
-            </a:r>
-          </a:p>
-        </p:txBody>
-      </p:sp>
-    </p:spTree>
-    <p:extLst>
-      <p:ext uri="{BB962C8B-B14F-4D97-AF65-F5344CB8AC3E}">
-        <p14:creationId xmlns:p14="http://schemas.microsoft.com/office/powerpoint/2010/main" val="4033732862"/>
-      </p:ext>
-    </p:extLst>
-  </p:cSld>
-  <p:clrMapOvr>
-    <a:masterClrMapping/>
-  </p:clrMapOvr>
-</p:sld>
-</file>
-
 <file path=ppt/slides/slide2.xml><?xml version="1.0" encoding="utf-8"?>
 <p:sld xmlns:a="http://schemas.openxmlformats.org/drawingml/2006/main" xmlns:r="http://schemas.openxmlformats.org/officeDocument/2006/relationships" xmlns:p="http://schemas.openxmlformats.org/presentationml/2006/main">
   <p:cSld>
@@ -4310,26 +3898,48 @@
           </a:bodyPr>
           <a:lstStyle/>
           <a:p>
-            <a:endParaRPr lang="en-US" sz="4400" dirty="0">
-              <a:solidFill>
-                <a:schemeClr val="bg1"/>
-              </a:solidFill>
-              <a:latin typeface="Avenir Medium" panose="02000503020000020003" pitchFamily="2" charset="0"/>
-              <a:ea typeface="Bodoni Ornaments" pitchFamily="2" charset="0"/>
-            </a:endParaRPr>
-          </a:p>
-          <a:p>
-            <a:endParaRPr lang="en-US" sz="4400" dirty="0">
-              <a:solidFill>
-                <a:schemeClr val="bg1"/>
-              </a:solidFill>
-              <a:latin typeface="Avenir Medium" panose="02000503020000020003" pitchFamily="2" charset="0"/>
-              <a:ea typeface="Bodoni Ornaments" pitchFamily="2" charset="0"/>
-            </a:endParaRPr>
-          </a:p>
-          <a:p>
-            <a:r>
-              <a:rPr lang="en-US" sz="4400" dirty="0">
+            <a:pPr algn="l"/>
+            <a:r>
+              <a:rPr lang="en-US" sz="3600" dirty="0">
+                <a:solidFill>
+                  <a:srgbClr val="FFFF00"/>
+                </a:solidFill>
+                <a:latin typeface="Avenir Medium" panose="02000503020000020003" pitchFamily="2" charset="0"/>
+                <a:ea typeface="Bodoni Ornaments" pitchFamily="2" charset="0"/>
+              </a:rPr>
+              <a:t>G C / G C </a:t>
+            </a:r>
+            <a:r>
+              <a:rPr lang="en-US" sz="3600" dirty="0">
+                <a:solidFill>
+                  <a:schemeClr val="accent1">
+                    <a:lumMod val="40000"/>
+                    <a:lumOff val="60000"/>
+                  </a:schemeClr>
+                </a:solidFill>
+                <a:latin typeface="Avenir Medium" panose="02000503020000020003" pitchFamily="2" charset="0"/>
+                <a:ea typeface="Bodoni Ornaments" pitchFamily="2" charset="0"/>
+              </a:rPr>
+              <a:t>CAPO 4th</a:t>
+            </a:r>
+          </a:p>
+          <a:p>
+            <a:pPr algn="l"/>
+            <a:r>
+              <a:rPr lang="en-US" sz="3600" dirty="0">
+                <a:solidFill>
+                  <a:srgbClr val="FFFF00"/>
+                </a:solidFill>
+                <a:latin typeface="Avenir Medium" panose="02000503020000020003" pitchFamily="2" charset="0"/>
+                <a:ea typeface="Bodoni Ornaments" pitchFamily="2" charset="0"/>
+              </a:rPr>
+              <a:t>                              G                           D</a:t>
+            </a:r>
+          </a:p>
+          <a:p>
+            <a:pPr algn="l"/>
+            <a:r>
+              <a:rPr lang="en-US" sz="3600" dirty="0">
                 <a:solidFill>
                   <a:schemeClr val="bg1"/>
                 </a:solidFill>
@@ -4340,8 +3950,22 @@
             </a:r>
           </a:p>
           <a:p>
-            <a:r>
-              <a:rPr lang="en-US" sz="4400" dirty="0">
+            <a:pPr algn="l"/>
+            <a:r>
+              <a:rPr lang="en-US" sz="3600" dirty="0">
+                <a:solidFill>
+                  <a:srgbClr val="FFFF00"/>
+                </a:solidFill>
+                <a:latin typeface="Avenir Medium" panose="02000503020000020003" pitchFamily="2" charset="0"/>
+                <a:ea typeface="Bodoni Ornaments" pitchFamily="2" charset="0"/>
+              </a:rPr>
+              <a:t>                            C                 Em                 D</a:t>
+            </a:r>
+          </a:p>
+          <a:p>
+            <a:pPr algn="l"/>
+            <a:r>
+              <a:rPr lang="en-US" sz="3600" dirty="0">
                 <a:solidFill>
                   <a:schemeClr val="bg1"/>
                 </a:solidFill>
@@ -4352,8 +3976,22 @@
             </a:r>
           </a:p>
           <a:p>
-            <a:r>
-              <a:rPr lang="en-US" sz="4400" dirty="0">
+            <a:pPr algn="l"/>
+            <a:r>
+              <a:rPr lang="en-US" sz="3600" dirty="0">
+                <a:solidFill>
+                  <a:srgbClr val="FFFF00"/>
+                </a:solidFill>
+                <a:latin typeface="Avenir Medium" panose="02000503020000020003" pitchFamily="2" charset="0"/>
+                <a:ea typeface="Bodoni Ornaments" pitchFamily="2" charset="0"/>
+              </a:rPr>
+              <a:t>                  G                                 D</a:t>
+            </a:r>
+          </a:p>
+          <a:p>
+            <a:pPr algn="l"/>
+            <a:r>
+              <a:rPr lang="en-US" sz="3600" dirty="0">
                 <a:solidFill>
                   <a:schemeClr val="bg1"/>
                 </a:solidFill>
@@ -4364,8 +4002,32 @@
             </a:r>
           </a:p>
           <a:p>
-            <a:r>
-              <a:rPr lang="en-US" sz="4400" dirty="0">
+            <a:pPr algn="l"/>
+            <a:r>
+              <a:rPr lang="en-US" sz="3600" dirty="0">
+                <a:solidFill>
+                  <a:schemeClr val="bg1"/>
+                </a:solidFill>
+                <a:latin typeface="Avenir Medium" panose="02000503020000020003" pitchFamily="2" charset="0"/>
+                <a:ea typeface="Bodoni Ornaments" pitchFamily="2" charset="0"/>
+              </a:rPr>
+              <a:t>                                </a:t>
+            </a:r>
+            <a:r>
+              <a:rPr lang="en-US" sz="3600" dirty="0">
+                <a:solidFill>
+                  <a:srgbClr val="FFFF00"/>
+                </a:solidFill>
+                <a:latin typeface="Avenir Medium" panose="02000503020000020003" pitchFamily="2" charset="0"/>
+                <a:ea typeface="Bodoni Ornaments" pitchFamily="2" charset="0"/>
+              </a:rPr>
+              <a:t>C          D              G</a:t>
+            </a:r>
+          </a:p>
+          <a:p>
+            <a:pPr algn="l"/>
+            <a:r>
+              <a:rPr lang="en-US" sz="3600" dirty="0">
                 <a:solidFill>
                   <a:schemeClr val="bg1"/>
                 </a:solidFill>
@@ -4449,17 +4111,22 @@
           </a:bodyPr>
           <a:lstStyle/>
           <a:p>
-            <a:endParaRPr lang="en-US" sz="4400" dirty="0">
-              <a:solidFill>
-                <a:schemeClr val="bg1"/>
-              </a:solidFill>
-              <a:latin typeface="Avenir Medium" panose="02000503020000020003" pitchFamily="2" charset="0"/>
-              <a:ea typeface="Bodoni Ornaments" pitchFamily="2" charset="0"/>
-            </a:endParaRPr>
-          </a:p>
-          <a:p>
-            <a:r>
-              <a:rPr lang="en-US" sz="4400" dirty="0">
+            <a:pPr algn="l"/>
+            <a:r>
+              <a:rPr lang="en-US" sz="3600" dirty="0">
+                <a:solidFill>
+                  <a:srgbClr val="FFFF00"/>
+                </a:solidFill>
+                <a:latin typeface="Avenir Medium" panose="02000503020000020003" pitchFamily="2" charset="0"/>
+                <a:ea typeface="Bodoni Ornaments" pitchFamily="2" charset="0"/>
+              </a:rPr>
+              <a:t>                                  C</a:t>
+            </a:r>
+          </a:p>
+          <a:p>
+            <a:pPr algn="l"/>
+            <a:r>
+              <a:rPr lang="en-US" sz="3600" dirty="0">
                 <a:solidFill>
                   <a:schemeClr val="bg1"/>
                 </a:solidFill>
@@ -4470,20 +4137,58 @@
             </a:r>
           </a:p>
           <a:p>
-            <a:r>
-              <a:rPr lang="en-US" sz="4400" dirty="0">
+            <a:pPr algn="l"/>
+            <a:r>
+              <a:rPr lang="en-US" sz="3600" dirty="0">
                 <a:solidFill>
                   <a:schemeClr val="bg1"/>
                 </a:solidFill>
                 <a:latin typeface="Avenir Medium" panose="02000503020000020003" pitchFamily="2" charset="0"/>
                 <a:ea typeface="Bodoni Ornaments" pitchFamily="2" charset="0"/>
               </a:rPr>
+              <a:t>                   </a:t>
+            </a:r>
+            <a:r>
+              <a:rPr lang="en-US" sz="3600" dirty="0">
+                <a:solidFill>
+                  <a:srgbClr val="FFFF00"/>
+                </a:solidFill>
+                <a:latin typeface="Avenir Medium" panose="02000503020000020003" pitchFamily="2" charset="0"/>
+                <a:ea typeface="Bodoni Ornaments" pitchFamily="2" charset="0"/>
+              </a:rPr>
+              <a:t>G</a:t>
+            </a:r>
+          </a:p>
+          <a:p>
+            <a:pPr algn="l"/>
+            <a:r>
+              <a:rPr lang="en-US" sz="3600" dirty="0">
+                <a:solidFill>
+                  <a:schemeClr val="bg1"/>
+                </a:solidFill>
+                <a:latin typeface="Avenir Medium" panose="02000503020000020003" pitchFamily="2" charset="0"/>
+                <a:ea typeface="Bodoni Ornaments" pitchFamily="2" charset="0"/>
+              </a:rPr>
               <a:t>Your loving kindness</a:t>
             </a:r>
           </a:p>
           <a:p>
-            <a:r>
-              <a:rPr lang="en-US" sz="4400" dirty="0">
+            <a:pPr algn="l"/>
+            <a:r>
+              <a:rPr lang="en-US" sz="3600" dirty="0">
+                <a:solidFill>
+                  <a:srgbClr val="FFFF00"/>
+                </a:solidFill>
+                <a:latin typeface="Avenir Medium" panose="02000503020000020003" pitchFamily="2" charset="0"/>
+                <a:ea typeface="Bodoni Ornaments" pitchFamily="2" charset="0"/>
+              </a:rPr>
+              <a:t>                            Em                    D</a:t>
+            </a:r>
+          </a:p>
+          <a:p>
+            <a:pPr algn="l"/>
+            <a:r>
+              <a:rPr lang="en-US" sz="3600" dirty="0">
                 <a:solidFill>
                   <a:schemeClr val="bg1"/>
                 </a:solidFill>
@@ -4494,8 +4199,22 @@
             </a:r>
           </a:p>
           <a:p>
-            <a:r>
-              <a:rPr lang="en-US" sz="4400" dirty="0">
+            <a:pPr algn="l"/>
+            <a:r>
+              <a:rPr lang="en-US" sz="3600" dirty="0">
+                <a:solidFill>
+                  <a:srgbClr val="FFFF00"/>
+                </a:solidFill>
+                <a:latin typeface="Avenir Medium" panose="02000503020000020003" pitchFamily="2" charset="0"/>
+                <a:ea typeface="Bodoni Ornaments" pitchFamily="2" charset="0"/>
+              </a:rPr>
+              <a:t>                        G                         D</a:t>
+            </a:r>
+          </a:p>
+          <a:p>
+            <a:pPr algn="l"/>
+            <a:r>
+              <a:rPr lang="en-US" sz="3600" dirty="0">
                 <a:solidFill>
                   <a:schemeClr val="bg1"/>
                 </a:solidFill>
@@ -4506,8 +4225,32 @@
             </a:r>
           </a:p>
           <a:p>
-            <a:r>
-              <a:rPr lang="en-US" sz="4400" dirty="0">
+            <a:pPr algn="l"/>
+            <a:r>
+              <a:rPr lang="en-US" sz="3600" dirty="0">
+                <a:solidFill>
+                  <a:schemeClr val="bg1"/>
+                </a:solidFill>
+                <a:latin typeface="Avenir Medium" panose="02000503020000020003" pitchFamily="2" charset="0"/>
+                <a:ea typeface="Bodoni Ornaments" pitchFamily="2" charset="0"/>
+              </a:rPr>
+              <a:t>          </a:t>
+            </a:r>
+            <a:r>
+              <a:rPr lang="en-US" sz="3600" dirty="0">
+                <a:solidFill>
+                  <a:srgbClr val="FFFF00"/>
+                </a:solidFill>
+                <a:latin typeface="Avenir Medium" panose="02000503020000020003" pitchFamily="2" charset="0"/>
+                <a:ea typeface="Bodoni Ornaments" pitchFamily="2" charset="0"/>
+              </a:rPr>
+              <a:t>C               D         G      C</a:t>
+            </a:r>
+          </a:p>
+          <a:p>
+            <a:pPr algn="l"/>
+            <a:r>
+              <a:rPr lang="en-US" sz="3600" dirty="0">
                 <a:solidFill>
                   <a:schemeClr val="bg1"/>
                 </a:solidFill>
@@ -4591,7 +4334,80 @@
           </a:bodyPr>
           <a:lstStyle/>
           <a:p>
-            <a:endParaRPr lang="en-US" sz="4400" dirty="0">
+            <a:pPr algn="l"/>
+            <a:r>
+              <a:rPr lang="en-US" sz="3600" dirty="0">
+                <a:solidFill>
+                  <a:srgbClr val="FFFF00"/>
+                </a:solidFill>
+                <a:latin typeface="Avenir Medium" panose="02000503020000020003" pitchFamily="2" charset="0"/>
+                <a:ea typeface="Bodoni Ornaments" pitchFamily="2" charset="0"/>
+              </a:rPr>
+              <a:t>                     G                          D</a:t>
+            </a:r>
+          </a:p>
+          <a:p>
+            <a:pPr algn="l"/>
+            <a:r>
+              <a:rPr lang="en-US" sz="3600" dirty="0">
+                <a:solidFill>
+                  <a:schemeClr val="bg1"/>
+                </a:solidFill>
+                <a:latin typeface="Avenir Medium" panose="02000503020000020003" pitchFamily="2" charset="0"/>
+                <a:ea typeface="Bodoni Ornaments" pitchFamily="2" charset="0"/>
+              </a:rPr>
+              <a:t>Who could imagine so great a mercy?</a:t>
+            </a:r>
+          </a:p>
+          <a:p>
+            <a:pPr algn="l"/>
+            <a:r>
+              <a:rPr lang="en-US" sz="3600" dirty="0">
+                <a:solidFill>
+                  <a:srgbClr val="FFFF00"/>
+                </a:solidFill>
+                <a:latin typeface="Avenir Medium" panose="02000503020000020003" pitchFamily="2" charset="0"/>
+                <a:ea typeface="Bodoni Ornaments" pitchFamily="2" charset="0"/>
+              </a:rPr>
+              <a:t>                             C          Em                       D</a:t>
+            </a:r>
+          </a:p>
+          <a:p>
+            <a:pPr algn="l"/>
+            <a:r>
+              <a:rPr lang="en-US" sz="3600" dirty="0">
+                <a:solidFill>
+                  <a:schemeClr val="bg1"/>
+                </a:solidFill>
+                <a:latin typeface="Avenir Medium" panose="02000503020000020003" pitchFamily="2" charset="0"/>
+                <a:ea typeface="Bodoni Ornaments" pitchFamily="2" charset="0"/>
+              </a:rPr>
+              <a:t>What heart could fathom such boundless grace?</a:t>
+            </a:r>
+          </a:p>
+          <a:p>
+            <a:pPr algn="l"/>
+            <a:r>
+              <a:rPr lang="en-US" sz="3600" dirty="0">
+                <a:solidFill>
+                  <a:schemeClr val="bg1"/>
+                </a:solidFill>
+                <a:latin typeface="Avenir Medium" panose="02000503020000020003" pitchFamily="2" charset="0"/>
+                <a:ea typeface="Bodoni Ornaments" pitchFamily="2" charset="0"/>
+              </a:rPr>
+              <a:t>                   </a:t>
+            </a:r>
+            <a:r>
+              <a:rPr lang="en-US" sz="3600" dirty="0">
+                <a:solidFill>
+                  <a:srgbClr val="FFFF00"/>
+                </a:solidFill>
+                <a:latin typeface="Avenir Medium" panose="02000503020000020003" pitchFamily="2" charset="0"/>
+                <a:ea typeface="Bodoni Ornaments" pitchFamily="2" charset="0"/>
+              </a:rPr>
+              <a:t>G                                         D</a:t>
+            </a:r>
+            <a:endParaRPr lang="en-US" sz="3600" dirty="0">
               <a:solidFill>
                 <a:schemeClr val="bg1"/>
               </a:solidFill>
@@ -4600,68 +4416,35 @@
             </a:endParaRPr>
           </a:p>
           <a:p>
-            <a:r>
-              <a:rPr lang="en-US" sz="4400" dirty="0">
+            <a:pPr algn="l"/>
+            <a:r>
+              <a:rPr lang="en-US" sz="3600" dirty="0">
                 <a:solidFill>
                   <a:schemeClr val="bg1"/>
                 </a:solidFill>
                 <a:latin typeface="Avenir Medium" panose="02000503020000020003" pitchFamily="2" charset="0"/>
                 <a:ea typeface="Bodoni Ornaments" pitchFamily="2" charset="0"/>
               </a:rPr>
-              <a:t>Who could imagine so great a mercy?</a:t>
-            </a:r>
-          </a:p>
-          <a:p>
-            <a:r>
-              <a:rPr lang="en-US" sz="4400" dirty="0">
-                <a:solidFill>
-                  <a:schemeClr val="bg1"/>
-                </a:solidFill>
-                <a:latin typeface="Avenir Medium" panose="02000503020000020003" pitchFamily="2" charset="0"/>
-                <a:ea typeface="Bodoni Ornaments" pitchFamily="2" charset="0"/>
-              </a:rPr>
-              <a:t>What heart could fathom </a:t>
-            </a:r>
-          </a:p>
-          <a:p>
-            <a:r>
-              <a:rPr lang="en-US" sz="4400" dirty="0">
-                <a:solidFill>
-                  <a:schemeClr val="bg1"/>
-                </a:solidFill>
-                <a:latin typeface="Avenir Medium" panose="02000503020000020003" pitchFamily="2" charset="0"/>
-                <a:ea typeface="Bodoni Ornaments" pitchFamily="2" charset="0"/>
-              </a:rPr>
-              <a:t>such boundless grace?</a:t>
-            </a:r>
-          </a:p>
-          <a:p>
-            <a:r>
-              <a:rPr lang="en-US" sz="4400" dirty="0">
-                <a:solidFill>
-                  <a:schemeClr val="bg1"/>
-                </a:solidFill>
-                <a:latin typeface="Avenir Medium" panose="02000503020000020003" pitchFamily="2" charset="0"/>
-                <a:ea typeface="Bodoni Ornaments" pitchFamily="2" charset="0"/>
-              </a:rPr>
-              <a:t>The God of ages </a:t>
-            </a:r>
-          </a:p>
-          <a:p>
-            <a:r>
-              <a:rPr lang="en-US" sz="4400" dirty="0">
-                <a:solidFill>
-                  <a:schemeClr val="bg1"/>
-                </a:solidFill>
-                <a:latin typeface="Avenir Medium" panose="02000503020000020003" pitchFamily="2" charset="0"/>
-                <a:ea typeface="Bodoni Ornaments" pitchFamily="2" charset="0"/>
-              </a:rPr>
-              <a:t>stepped down from glory</a:t>
-            </a:r>
-          </a:p>
-          <a:p>
-            <a:r>
-              <a:rPr lang="en-US" sz="4400" dirty="0">
+              <a:t>The God of ages stepped down from glory</a:t>
+            </a:r>
+          </a:p>
+          <a:p>
+            <a:pPr algn="l"/>
+            <a:r>
+              <a:rPr lang="en-US" sz="3600" dirty="0">
+                <a:solidFill>
+                  <a:srgbClr val="FFFF00"/>
+                </a:solidFill>
+                <a:latin typeface="Avenir Medium" panose="02000503020000020003" pitchFamily="2" charset="0"/>
+                <a:ea typeface="Bodoni Ornaments" pitchFamily="2" charset="0"/>
+              </a:rPr>
+              <a:t>                   C          D               G</a:t>
+            </a:r>
+          </a:p>
+          <a:p>
+            <a:pPr algn="l"/>
+            <a:r>
+              <a:rPr lang="en-US" sz="3600" dirty="0">
                 <a:solidFill>
                   <a:schemeClr val="bg1"/>
                 </a:solidFill>
@@ -4754,7 +4537,54 @@
             </a:endParaRPr>
           </a:p>
           <a:p>
-            <a:endParaRPr lang="en-US" sz="4400" dirty="0">
+            <a:pPr algn="l"/>
+            <a:r>
+              <a:rPr lang="en-US" sz="3600" dirty="0">
+                <a:solidFill>
+                  <a:srgbClr val="FFFF00"/>
+                </a:solidFill>
+                <a:latin typeface="Avenir Medium" panose="02000503020000020003" pitchFamily="2" charset="0"/>
+                <a:ea typeface="Bodoni Ornaments" pitchFamily="2" charset="0"/>
+              </a:rPr>
+              <a:t>                       C                        G</a:t>
+            </a:r>
+          </a:p>
+          <a:p>
+            <a:pPr algn="l"/>
+            <a:r>
+              <a:rPr lang="en-US" sz="3600" dirty="0">
+                <a:solidFill>
+                  <a:schemeClr val="bg1"/>
+                </a:solidFill>
+                <a:latin typeface="Avenir Medium" panose="02000503020000020003" pitchFamily="2" charset="0"/>
+                <a:ea typeface="Bodoni Ornaments" pitchFamily="2" charset="0"/>
+              </a:rPr>
+              <a:t>The cross has spoken, I am forgiven</a:t>
+            </a:r>
+          </a:p>
+          <a:p>
+            <a:pPr algn="l"/>
+            <a:r>
+              <a:rPr lang="en-US" sz="3600" dirty="0">
+                <a:solidFill>
+                  <a:schemeClr val="bg1"/>
+                </a:solidFill>
+                <a:latin typeface="Avenir Medium" panose="02000503020000020003" pitchFamily="2" charset="0"/>
+                <a:ea typeface="Bodoni Ornaments" pitchFamily="2" charset="0"/>
+              </a:rPr>
+              <a:t>                    </a:t>
+            </a:r>
+            <a:r>
+              <a:rPr lang="en-US" sz="3600" dirty="0">
+                <a:solidFill>
+                  <a:srgbClr val="FFFF00"/>
+                </a:solidFill>
+                <a:latin typeface="Avenir Medium" panose="02000503020000020003" pitchFamily="2" charset="0"/>
+                <a:ea typeface="Bodoni Ornaments" pitchFamily="2" charset="0"/>
+              </a:rPr>
+              <a:t>Em                        D</a:t>
+            </a:r>
+            <a:endParaRPr lang="en-US" sz="3600" dirty="0">
               <a:solidFill>
                 <a:schemeClr val="bg1"/>
               </a:solidFill>
@@ -4763,44 +4593,78 @@
             </a:endParaRPr>
           </a:p>
           <a:p>
-            <a:r>
-              <a:rPr lang="en-US" sz="4400" dirty="0">
+            <a:pPr algn="l"/>
+            <a:r>
+              <a:rPr lang="en-US" sz="3600" dirty="0">
                 <a:solidFill>
                   <a:schemeClr val="bg1"/>
                 </a:solidFill>
                 <a:latin typeface="Avenir Medium" panose="02000503020000020003" pitchFamily="2" charset="0"/>
                 <a:ea typeface="Bodoni Ornaments" pitchFamily="2" charset="0"/>
               </a:rPr>
-              <a:t>The cross has spoken, I am forgiven</a:t>
-            </a:r>
-          </a:p>
-          <a:p>
-            <a:r>
-              <a:rPr lang="en-US" sz="4400" dirty="0">
+              <a:t>The King of kings calls me His own</a:t>
+            </a:r>
+          </a:p>
+          <a:p>
+            <a:pPr algn="l"/>
+            <a:r>
+              <a:rPr lang="en-US" sz="3600" dirty="0">
+                <a:solidFill>
+                  <a:srgbClr val="FFFF00"/>
+                </a:solidFill>
+                <a:latin typeface="Avenir Medium" panose="02000503020000020003" pitchFamily="2" charset="0"/>
+                <a:ea typeface="Bodoni Ornaments" pitchFamily="2" charset="0"/>
+              </a:rPr>
+              <a:t>                G                          D</a:t>
+            </a:r>
+          </a:p>
+          <a:p>
+            <a:pPr algn="l"/>
+            <a:r>
+              <a:rPr lang="en-US" sz="3600" dirty="0">
                 <a:solidFill>
                   <a:schemeClr val="bg1"/>
                 </a:solidFill>
                 <a:latin typeface="Avenir Medium" panose="02000503020000020003" pitchFamily="2" charset="0"/>
                 <a:ea typeface="Bodoni Ornaments" pitchFamily="2" charset="0"/>
               </a:rPr>
-              <a:t>The King of kings calls me His own</a:t>
-            </a:r>
-          </a:p>
-          <a:p>
-            <a:r>
-              <a:rPr lang="en-US" sz="4400" dirty="0">
+              <a:t>Beautiful Savior, I'm Yours forever</a:t>
+            </a:r>
+          </a:p>
+          <a:p>
+            <a:pPr algn="l"/>
+            <a:r>
+              <a:rPr lang="en-US" sz="3600" dirty="0">
                 <a:solidFill>
                   <a:schemeClr val="bg1"/>
                 </a:solidFill>
                 <a:latin typeface="Avenir Medium" panose="02000503020000020003" pitchFamily="2" charset="0"/>
                 <a:ea typeface="Bodoni Ornaments" pitchFamily="2" charset="0"/>
               </a:rPr>
-              <a:t>Beautiful Savior, I'm Yours forever</a:t>
-            </a:r>
-          </a:p>
-          <a:p>
-            <a:r>
-              <a:rPr lang="en-US" sz="4400" dirty="0">
+              <a:t>            </a:t>
+            </a:r>
+            <a:r>
+              <a:rPr lang="en-US" sz="3600" dirty="0">
+                <a:solidFill>
+                  <a:srgbClr val="FFFF00"/>
+                </a:solidFill>
+                <a:latin typeface="Avenir Medium" panose="02000503020000020003" pitchFamily="2" charset="0"/>
+                <a:ea typeface="Bodoni Ornaments" pitchFamily="2" charset="0"/>
+              </a:rPr>
+              <a:t>C              D        G</a:t>
+            </a:r>
+            <a:endParaRPr lang="en-US" sz="3600" dirty="0">
+              <a:solidFill>
+                <a:schemeClr val="bg1"/>
+              </a:solidFill>
+              <a:latin typeface="Avenir Medium" panose="02000503020000020003" pitchFamily="2" charset="0"/>
+              <a:ea typeface="Bodoni Ornaments" pitchFamily="2" charset="0"/>
+            </a:endParaRPr>
+          </a:p>
+          <a:p>
+            <a:pPr algn="l"/>
+            <a:r>
+              <a:rPr lang="en-US" sz="3600" dirty="0">
                 <a:solidFill>
                   <a:schemeClr val="bg1"/>
                 </a:solidFill>
@@ -4886,7 +4750,28 @@
           </a:bodyPr>
           <a:lstStyle/>
           <a:p>
-            <a:endParaRPr lang="en-US" sz="4400" dirty="0">
+            <a:pPr algn="l"/>
+            <a:r>
+              <a:rPr lang="en-US" sz="3600" dirty="0">
+                <a:solidFill>
+                  <a:schemeClr val="bg1"/>
+                </a:solidFill>
+                <a:latin typeface="Avenir Medium" panose="02000503020000020003" pitchFamily="2" charset="0"/>
+                <a:ea typeface="Bodoni Ornaments" pitchFamily="2" charset="0"/>
+              </a:rPr>
+              <a:t>         </a:t>
+            </a:r>
+            <a:r>
+              <a:rPr lang="en-US" sz="3600" dirty="0">
+                <a:solidFill>
+                  <a:srgbClr val="FFFF00"/>
+                </a:solidFill>
+                <a:latin typeface="Avenir Medium" panose="02000503020000020003" pitchFamily="2" charset="0"/>
+                <a:ea typeface="Bodoni Ornaments" pitchFamily="2" charset="0"/>
+              </a:rPr>
+              <a:t>C G                    D                        Em   </a:t>
+            </a:r>
+            <a:endParaRPr lang="en-US" sz="3600" dirty="0">
               <a:solidFill>
                 <a:schemeClr val="bg1"/>
               </a:solidFill>
@@ -4895,32 +4780,52 @@
             </a:endParaRPr>
           </a:p>
           <a:p>
-            <a:r>
-              <a:rPr lang="en-US" sz="4400" dirty="0">
+            <a:pPr algn="l"/>
+            <a:r>
+              <a:rPr lang="en-US" sz="3600" dirty="0">
                 <a:solidFill>
                   <a:schemeClr val="bg1"/>
                 </a:solidFill>
                 <a:latin typeface="Avenir Medium" panose="02000503020000020003" pitchFamily="2" charset="0"/>
                 <a:ea typeface="Bodoni Ornaments" pitchFamily="2" charset="0"/>
               </a:rPr>
-              <a:t>Hallelujah, praise the One </a:t>
-            </a:r>
-          </a:p>
-          <a:p>
-            <a:r>
-              <a:rPr lang="en-US" sz="4400" dirty="0">
+              <a:t>Hallelujah, praise the One who set me free</a:t>
+            </a:r>
+          </a:p>
+          <a:p>
+            <a:pPr algn="l"/>
+            <a:r>
+              <a:rPr lang="en-US" sz="3600" dirty="0">
                 <a:solidFill>
                   <a:schemeClr val="bg1"/>
                 </a:solidFill>
                 <a:latin typeface="Avenir Medium" panose="02000503020000020003" pitchFamily="2" charset="0"/>
                 <a:ea typeface="Bodoni Ornaments" pitchFamily="2" charset="0"/>
               </a:rPr>
-              <a:t>who set me free</a:t>
-            </a:r>
-          </a:p>
-          <a:p>
-            <a:r>
-              <a:rPr lang="en-US" sz="4400" dirty="0">
+              <a:t>         </a:t>
+            </a:r>
+            <a:r>
+              <a:rPr lang="en-US" sz="3600" dirty="0">
+                <a:solidFill>
+                  <a:srgbClr val="FFFF00"/>
+                </a:solidFill>
+                <a:latin typeface="Avenir Medium" panose="02000503020000020003" pitchFamily="2" charset="0"/>
+                <a:ea typeface="Bodoni Ornaments" pitchFamily="2" charset="0"/>
+              </a:rPr>
+              <a:t>C G                    D                        Em   </a:t>
+            </a:r>
+            <a:endParaRPr lang="en-US" sz="3600" dirty="0">
+              <a:solidFill>
+                <a:schemeClr val="bg1"/>
+              </a:solidFill>
+              <a:latin typeface="Avenir Medium" panose="02000503020000020003" pitchFamily="2" charset="0"/>
+              <a:ea typeface="Bodoni Ornaments" pitchFamily="2" charset="0"/>
+            </a:endParaRPr>
+          </a:p>
+          <a:p>
+            <a:pPr algn="l"/>
+            <a:r>
+              <a:rPr lang="en-US" sz="3600" dirty="0">
                 <a:solidFill>
                   <a:schemeClr val="bg1"/>
                 </a:solidFill>
@@ -4931,20 +4836,65 @@
             </a:r>
           </a:p>
           <a:p>
-            <a:r>
-              <a:rPr lang="en-US" sz="4400" dirty="0">
+            <a:pPr algn="l"/>
+            <a:r>
+              <a:rPr lang="en-US" sz="3600" dirty="0">
                 <a:solidFill>
                   <a:schemeClr val="bg1"/>
                 </a:solidFill>
                 <a:latin typeface="Avenir Medium" panose="02000503020000020003" pitchFamily="2" charset="0"/>
                 <a:ea typeface="Bodoni Ornaments" pitchFamily="2" charset="0"/>
               </a:rPr>
+              <a:t>                 </a:t>
+            </a:r>
+            <a:r>
+              <a:rPr lang="en-US" sz="3600" dirty="0">
+                <a:solidFill>
+                  <a:srgbClr val="FFFF00"/>
+                </a:solidFill>
+                <a:latin typeface="Avenir Medium" panose="02000503020000020003" pitchFamily="2" charset="0"/>
+                <a:ea typeface="Bodoni Ornaments" pitchFamily="2" charset="0"/>
+              </a:rPr>
+              <a:t>C                   G</a:t>
+            </a:r>
+            <a:endParaRPr lang="en-US" sz="3600" dirty="0">
+              <a:solidFill>
+                <a:schemeClr val="bg1"/>
+              </a:solidFill>
+              <a:latin typeface="Avenir Medium" panose="02000503020000020003" pitchFamily="2" charset="0"/>
+              <a:ea typeface="Bodoni Ornaments" pitchFamily="2" charset="0"/>
+            </a:endParaRPr>
+          </a:p>
+          <a:p>
+            <a:pPr algn="l"/>
+            <a:r>
+              <a:rPr lang="en-US" sz="3600" dirty="0">
+                <a:solidFill>
+                  <a:schemeClr val="bg1"/>
+                </a:solidFill>
+                <a:latin typeface="Avenir Medium" panose="02000503020000020003" pitchFamily="2" charset="0"/>
+                <a:ea typeface="Bodoni Ornaments" pitchFamily="2" charset="0"/>
+              </a:rPr>
               <a:t>You have broken every chain</a:t>
             </a:r>
           </a:p>
           <a:p>
-            <a:r>
-              <a:rPr lang="en-US" sz="4400" dirty="0">
+            <a:pPr algn="l"/>
+            <a:r>
+              <a:rPr lang="en-US" sz="3600" dirty="0">
+                <a:solidFill>
+                  <a:srgbClr val="FFFF00"/>
+                </a:solidFill>
+                <a:latin typeface="Avenir Medium" panose="02000503020000020003" pitchFamily="2" charset="0"/>
+                <a:ea typeface="Bodoni Ornaments" pitchFamily="2" charset="0"/>
+              </a:rPr>
+              <a:t>                D                         Em   D</a:t>
+            </a:r>
+          </a:p>
+          <a:p>
+            <a:pPr algn="l"/>
+            <a:r>
+              <a:rPr lang="en-US" sz="3600" dirty="0">
                 <a:solidFill>
                   <a:schemeClr val="bg1"/>
                 </a:solidFill>
@@ -4955,8 +4905,22 @@
             </a:r>
           </a:p>
           <a:p>
-            <a:r>
-              <a:rPr lang="en-US" sz="4400" dirty="0">
+            <a:pPr algn="l"/>
+            <a:r>
+              <a:rPr lang="en-US" sz="3600" dirty="0">
+                <a:solidFill>
+                  <a:srgbClr val="FFFF00"/>
+                </a:solidFill>
+                <a:latin typeface="Avenir Medium" panose="02000503020000020003" pitchFamily="2" charset="0"/>
+                <a:ea typeface="Bodoni Ornaments" pitchFamily="2" charset="0"/>
+              </a:rPr>
+              <a:t>          C                D        G</a:t>
+            </a:r>
+          </a:p>
+          <a:p>
+            <a:pPr algn="l"/>
+            <a:r>
+              <a:rPr lang="en-US" sz="3600" dirty="0">
                 <a:solidFill>
                   <a:schemeClr val="bg1"/>
                 </a:solidFill>
@@ -5040,7 +5004,28 @@
           </a:bodyPr>
           <a:lstStyle/>
           <a:p>
-            <a:endParaRPr lang="en-US" sz="4400" dirty="0">
+            <a:pPr algn="l"/>
+            <a:r>
+              <a:rPr lang="en-US" sz="3600" dirty="0">
+                <a:solidFill>
+                  <a:schemeClr val="bg1"/>
+                </a:solidFill>
+                <a:latin typeface="Avenir Medium" panose="02000503020000020003" pitchFamily="2" charset="0"/>
+                <a:ea typeface="Bodoni Ornaments" pitchFamily="2" charset="0"/>
+              </a:rPr>
+              <a:t>                            </a:t>
+            </a:r>
+            <a:r>
+              <a:rPr lang="en-US" sz="3600" dirty="0">
+                <a:solidFill>
+                  <a:srgbClr val="FFFF00"/>
+                </a:solidFill>
+                <a:latin typeface="Avenir Medium" panose="02000503020000020003" pitchFamily="2" charset="0"/>
+                <a:ea typeface="Bodoni Ornaments" pitchFamily="2" charset="0"/>
+              </a:rPr>
+              <a:t>G                                      D</a:t>
+            </a:r>
+            <a:endParaRPr lang="en-US" sz="3600" dirty="0">
               <a:solidFill>
                 <a:schemeClr val="bg1"/>
               </a:solidFill>
@@ -5049,7 +5034,67 @@
             </a:endParaRPr>
           </a:p>
           <a:p>
-            <a:endParaRPr lang="en-US" sz="4400" dirty="0">
+            <a:pPr algn="l"/>
+            <a:r>
+              <a:rPr lang="en-US" sz="3600" dirty="0">
+                <a:solidFill>
+                  <a:schemeClr val="bg1"/>
+                </a:solidFill>
+                <a:latin typeface="Avenir Medium" panose="02000503020000020003" pitchFamily="2" charset="0"/>
+                <a:ea typeface="Bodoni Ornaments" pitchFamily="2" charset="0"/>
+              </a:rPr>
+              <a:t>Then came the morning that sealed the promise</a:t>
+            </a:r>
+          </a:p>
+          <a:p>
+            <a:pPr algn="l"/>
+            <a:r>
+              <a:rPr lang="en-US" sz="3600" dirty="0">
+                <a:solidFill>
+                  <a:srgbClr val="FFFF00"/>
+                </a:solidFill>
+                <a:latin typeface="Avenir Medium" panose="02000503020000020003" pitchFamily="2" charset="0"/>
+                <a:ea typeface="Bodoni Ornaments" pitchFamily="2" charset="0"/>
+              </a:rPr>
+              <a:t>                    C       Em          D</a:t>
+            </a:r>
+          </a:p>
+          <a:p>
+            <a:pPr algn="l"/>
+            <a:r>
+              <a:rPr lang="en-US" sz="3600" dirty="0">
+                <a:solidFill>
+                  <a:schemeClr val="bg1"/>
+                </a:solidFill>
+                <a:latin typeface="Avenir Medium" panose="02000503020000020003" pitchFamily="2" charset="0"/>
+                <a:ea typeface="Bodoni Ornaments" pitchFamily="2" charset="0"/>
+              </a:rPr>
+              <a:t>Your buried body began to breathe</a:t>
+            </a:r>
+          </a:p>
+          <a:p>
+            <a:pPr algn="l"/>
+            <a:r>
+              <a:rPr lang="en-US" sz="3600" dirty="0">
+                <a:solidFill>
+                  <a:schemeClr val="bg1"/>
+                </a:solidFill>
+                <a:latin typeface="Avenir Medium" panose="02000503020000020003" pitchFamily="2" charset="0"/>
+                <a:ea typeface="Bodoni Ornaments" pitchFamily="2" charset="0"/>
+              </a:rPr>
+              <a:t>                  </a:t>
+            </a:r>
+            <a:r>
+              <a:rPr lang="en-US" sz="3600" dirty="0">
+                <a:solidFill>
+                  <a:srgbClr val="FFFF00"/>
+                </a:solidFill>
+                <a:latin typeface="Avenir Medium" panose="02000503020000020003" pitchFamily="2" charset="0"/>
+                <a:ea typeface="Bodoni Ornaments" pitchFamily="2" charset="0"/>
+              </a:rPr>
+              <a:t>G                              D</a:t>
+            </a:r>
+            <a:endParaRPr lang="en-US" sz="3600" dirty="0">
               <a:solidFill>
                 <a:schemeClr val="bg1"/>
               </a:solidFill>
@@ -5058,39 +5103,68 @@
             </a:endParaRPr>
           </a:p>
           <a:p>
-            <a:r>
-              <a:rPr lang="en-US" sz="4400" dirty="0">
+            <a:pPr algn="l"/>
+            <a:r>
+              <a:rPr lang="en-US" sz="3600" dirty="0">
                 <a:solidFill>
                   <a:schemeClr val="bg1"/>
                 </a:solidFill>
                 <a:latin typeface="Avenir Medium" panose="02000503020000020003" pitchFamily="2" charset="0"/>
                 <a:ea typeface="Bodoni Ornaments" pitchFamily="2" charset="0"/>
               </a:rPr>
-              <a:t>Then came the morning </a:t>
-            </a:r>
-          </a:p>
-          <a:p>
-            <a:r>
-              <a:rPr lang="en-US" sz="4400" dirty="0">
+              <a:t>Out of the silence, the Roaring Lion</a:t>
+            </a:r>
+          </a:p>
+          <a:p>
+            <a:pPr algn="l"/>
+            <a:r>
+              <a:rPr lang="en-US" sz="3600" dirty="0">
+                <a:solidFill>
+                  <a:srgbClr val="FFFF00"/>
+                </a:solidFill>
+                <a:latin typeface="Avenir Medium" panose="02000503020000020003" pitchFamily="2" charset="0"/>
+                <a:ea typeface="Bodoni Ornaments" pitchFamily="2" charset="0"/>
+              </a:rPr>
+              <a:t>                       C                     D           G   (Em)</a:t>
+            </a:r>
+          </a:p>
+          <a:p>
+            <a:pPr algn="l"/>
+            <a:r>
+              <a:rPr lang="en-US" sz="3600" dirty="0">
                 <a:solidFill>
                   <a:schemeClr val="bg1"/>
                 </a:solidFill>
                 <a:latin typeface="Avenir Medium" panose="02000503020000020003" pitchFamily="2" charset="0"/>
                 <a:ea typeface="Bodoni Ornaments" pitchFamily="2" charset="0"/>
               </a:rPr>
-              <a:t>that sealed the promise</a:t>
-            </a:r>
-          </a:p>
-          <a:p>
-            <a:r>
-              <a:rPr lang="en-US" sz="4400" dirty="0">
+              <a:t>Declared the grave has no claim on me</a:t>
+            </a:r>
+          </a:p>
+          <a:p>
+            <a:pPr algn="l"/>
+            <a:r>
+              <a:rPr lang="en-US" sz="3600" dirty="0">
+                <a:solidFill>
+                  <a:srgbClr val="FFFF00"/>
+                </a:solidFill>
+                <a:latin typeface="Avenir Medium" panose="02000503020000020003" pitchFamily="2" charset="0"/>
+                <a:ea typeface="Bodoni Ornaments" pitchFamily="2" charset="0"/>
+              </a:rPr>
+              <a:t> C                  D       G</a:t>
+            </a:r>
+          </a:p>
+          <a:p>
+            <a:pPr algn="l"/>
+            <a:r>
+              <a:rPr lang="en-US" sz="3600" dirty="0">
                 <a:solidFill>
                   <a:schemeClr val="bg1"/>
                 </a:solidFill>
                 <a:latin typeface="Avenir Medium" panose="02000503020000020003" pitchFamily="2" charset="0"/>
                 <a:ea typeface="Bodoni Ornaments" pitchFamily="2" charset="0"/>
               </a:rPr>
-              <a:t>Your buried body began to breathe</a:t>
+              <a:t>Jesus, Yours is the victory</a:t>
             </a:r>
           </a:p>
           <a:p>
@@ -5123,7 +5197,9 @@
     <p:bg>
       <p:bgPr>
         <a:solidFill>
-          <a:schemeClr val="accent1"/>
+          <a:schemeClr val="accent5">
+            <a:lumMod val="50000"/>
+          </a:schemeClr>
         </a:solidFill>
         <a:effectLst/>
       </p:bgPr>
@@ -5133,7 +5209,7 @@
         <p:cNvPr id="1" name="">
           <a:extLst>
             <a:ext uri="{FF2B5EF4-FFF2-40B4-BE49-F238E27FC236}">
-              <a16:creationId xmlns:a16="http://schemas.microsoft.com/office/drawing/2014/main" id="{86DA7E8E-A250-DFD6-C0B1-A1D632DA069E}"/>
+              <a16:creationId xmlns:a16="http://schemas.microsoft.com/office/drawing/2014/main" id="{9DAF1E6F-2771-ED35-A97D-BAD08296FB32}"/>
             </a:ext>
           </a:extLst>
         </p:cNvPr>
@@ -5153,7 +5229,7 @@
           <p:cNvPr id="3" name="Subtitle 2">
             <a:extLst>
               <a:ext uri="{FF2B5EF4-FFF2-40B4-BE49-F238E27FC236}">
-                <a16:creationId xmlns:a16="http://schemas.microsoft.com/office/drawing/2014/main" id="{EF6D1DC0-A400-8203-3944-4066F16E69FE}"/>
+                <a16:creationId xmlns:a16="http://schemas.microsoft.com/office/drawing/2014/main" id="{18E2F239-F4DC-5E9E-58FF-4D1AF8E3FED0}"/>
               </a:ext>
             </a:extLst>
           </p:cNvPr>
@@ -5176,7 +5252,28 @@
           </a:bodyPr>
           <a:lstStyle/>
           <a:p>
-            <a:endParaRPr lang="en-US" sz="4400" dirty="0">
+            <a:pPr algn="l"/>
+            <a:r>
+              <a:rPr lang="en-US" sz="3600" dirty="0">
+                <a:solidFill>
+                  <a:schemeClr val="bg1"/>
+                </a:solidFill>
+                <a:latin typeface="Avenir Medium" panose="02000503020000020003" pitchFamily="2" charset="0"/>
+                <a:ea typeface="Bodoni Ornaments" pitchFamily="2" charset="0"/>
+              </a:rPr>
+              <a:t>         </a:t>
+            </a:r>
+            <a:r>
+              <a:rPr lang="en-US" sz="3600" dirty="0">
+                <a:solidFill>
+                  <a:srgbClr val="FFFF00"/>
+                </a:solidFill>
+                <a:latin typeface="Avenir Medium" panose="02000503020000020003" pitchFamily="2" charset="0"/>
+                <a:ea typeface="Bodoni Ornaments" pitchFamily="2" charset="0"/>
+              </a:rPr>
+              <a:t>C G                    D                        Em   </a:t>
+            </a:r>
+            <a:endParaRPr lang="en-US" sz="3600" dirty="0">
               <a:solidFill>
                 <a:schemeClr val="bg1"/>
               </a:solidFill>
@@ -5185,7 +5282,41 @@
             </a:endParaRPr>
           </a:p>
           <a:p>
-            <a:endParaRPr lang="en-US" sz="4400" dirty="0">
+            <a:pPr algn="l"/>
+            <a:r>
+              <a:rPr lang="en-US" sz="3600" dirty="0">
+                <a:solidFill>
+                  <a:schemeClr val="bg1"/>
+                </a:solidFill>
+                <a:latin typeface="Avenir Medium" panose="02000503020000020003" pitchFamily="2" charset="0"/>
+                <a:ea typeface="Bodoni Ornaments" pitchFamily="2" charset="0"/>
+              </a:rPr>
+              <a:t>Hallelujah, praise the One who set me free</a:t>
+            </a:r>
+          </a:p>
+          <a:p>
+            <a:pPr algn="l"/>
+            <a:r>
+              <a:rPr lang="en-US" sz="3600" dirty="0">
+                <a:solidFill>
+                  <a:schemeClr val="bg1"/>
+                </a:solidFill>
+                <a:latin typeface="Avenir Medium" panose="02000503020000020003" pitchFamily="2" charset="0"/>
+                <a:ea typeface="Bodoni Ornaments" pitchFamily="2" charset="0"/>
+              </a:rPr>
+              <a:t>         </a:t>
+            </a:r>
+            <a:r>
+              <a:rPr lang="en-US" sz="3600" dirty="0">
+                <a:solidFill>
+                  <a:srgbClr val="FFFF00"/>
+                </a:solidFill>
+                <a:latin typeface="Avenir Medium" panose="02000503020000020003" pitchFamily="2" charset="0"/>
+                <a:ea typeface="Bodoni Ornaments" pitchFamily="2" charset="0"/>
+              </a:rPr>
+              <a:t>C G                    D                        Em   </a:t>
+            </a:r>
+            <a:endParaRPr lang="en-US" sz="3600" dirty="0">
               <a:solidFill>
                 <a:schemeClr val="bg1"/>
               </a:solidFill>
@@ -5194,27 +5325,111 @@
             </a:endParaRPr>
           </a:p>
           <a:p>
-            <a:r>
-              <a:rPr lang="en-US" sz="4400" dirty="0">
+            <a:pPr algn="l"/>
+            <a:r>
+              <a:rPr lang="en-US" sz="3600" dirty="0">
                 <a:solidFill>
                   <a:schemeClr val="bg1"/>
                 </a:solidFill>
                 <a:latin typeface="Avenir Medium" panose="02000503020000020003" pitchFamily="2" charset="0"/>
                 <a:ea typeface="Bodoni Ornaments" pitchFamily="2" charset="0"/>
               </a:rPr>
-              <a:t>Out of the silence, the Roaring Lion</a:t>
-            </a:r>
-          </a:p>
-          <a:p>
-            <a:r>
-              <a:rPr lang="en-US" sz="4400" dirty="0">
+              <a:t>Hallelujah, death has lost its grip on me</a:t>
+            </a:r>
+          </a:p>
+          <a:p>
+            <a:pPr algn="l"/>
+            <a:r>
+              <a:rPr lang="en-US" sz="3600" dirty="0">
                 <a:solidFill>
                   <a:schemeClr val="bg1"/>
                 </a:solidFill>
                 <a:latin typeface="Avenir Medium" panose="02000503020000020003" pitchFamily="2" charset="0"/>
                 <a:ea typeface="Bodoni Ornaments" pitchFamily="2" charset="0"/>
               </a:rPr>
-              <a:t>Declared the grave has no claim on me</a:t>
+              <a:t>                 </a:t>
+            </a:r>
+            <a:r>
+              <a:rPr lang="en-US" sz="3600" dirty="0">
+                <a:solidFill>
+                  <a:srgbClr val="FFFF00"/>
+                </a:solidFill>
+                <a:latin typeface="Avenir Medium" panose="02000503020000020003" pitchFamily="2" charset="0"/>
+                <a:ea typeface="Bodoni Ornaments" pitchFamily="2" charset="0"/>
+              </a:rPr>
+              <a:t>C                   G</a:t>
+            </a:r>
+            <a:endParaRPr lang="en-US" sz="3600" dirty="0">
+              <a:solidFill>
+                <a:schemeClr val="bg1"/>
+              </a:solidFill>
+              <a:latin typeface="Avenir Medium" panose="02000503020000020003" pitchFamily="2" charset="0"/>
+              <a:ea typeface="Bodoni Ornaments" pitchFamily="2" charset="0"/>
+            </a:endParaRPr>
+          </a:p>
+          <a:p>
+            <a:pPr algn="l"/>
+            <a:r>
+              <a:rPr lang="en-US" sz="3600" dirty="0">
+                <a:solidFill>
+                  <a:schemeClr val="bg1"/>
+                </a:solidFill>
+                <a:latin typeface="Avenir Medium" panose="02000503020000020003" pitchFamily="2" charset="0"/>
+                <a:ea typeface="Bodoni Ornaments" pitchFamily="2" charset="0"/>
+              </a:rPr>
+              <a:t>You have broken every chain</a:t>
+            </a:r>
+          </a:p>
+          <a:p>
+            <a:pPr algn="l"/>
+            <a:r>
+              <a:rPr lang="en-US" sz="3600" dirty="0">
+                <a:solidFill>
+                  <a:srgbClr val="FFFF00"/>
+                </a:solidFill>
+                <a:latin typeface="Avenir Medium" panose="02000503020000020003" pitchFamily="2" charset="0"/>
+                <a:ea typeface="Bodoni Ornaments" pitchFamily="2" charset="0"/>
+              </a:rPr>
+              <a:t>                D                         Em   D</a:t>
+            </a:r>
+          </a:p>
+          <a:p>
+            <a:pPr algn="l"/>
+            <a:r>
+              <a:rPr lang="en-US" sz="3600" dirty="0">
+                <a:solidFill>
+                  <a:schemeClr val="bg1"/>
+                </a:solidFill>
+                <a:latin typeface="Avenir Medium" panose="02000503020000020003" pitchFamily="2" charset="0"/>
+                <a:ea typeface="Bodoni Ornaments" pitchFamily="2" charset="0"/>
+              </a:rPr>
+              <a:t>There's salvation in Your name</a:t>
+            </a:r>
+          </a:p>
+          <a:p>
+            <a:pPr algn="l"/>
+            <a:r>
+              <a:rPr lang="en-US" sz="3600" dirty="0">
+                <a:solidFill>
+                  <a:srgbClr val="FFFF00"/>
+                </a:solidFill>
+                <a:latin typeface="Avenir Medium" panose="02000503020000020003" pitchFamily="2" charset="0"/>
+                <a:ea typeface="Bodoni Ornaments" pitchFamily="2" charset="0"/>
+              </a:rPr>
+              <a:t>          C                D        G</a:t>
+            </a:r>
+          </a:p>
+          <a:p>
+            <a:pPr algn="l"/>
+            <a:r>
+              <a:rPr lang="en-US" sz="3600" dirty="0">
+                <a:solidFill>
+                  <a:schemeClr val="bg1"/>
+                </a:solidFill>
+                <a:latin typeface="Avenir Medium" panose="02000503020000020003" pitchFamily="2" charset="0"/>
+                <a:ea typeface="Bodoni Ornaments" pitchFamily="2" charset="0"/>
+              </a:rPr>
+              <a:t>Jesus Christ, my living hope</a:t>
             </a:r>
           </a:p>
         </p:txBody>
@@ -5222,7 +5437,7 @@
     </p:spTree>
     <p:extLst>
       <p:ext uri="{BB962C8B-B14F-4D97-AF65-F5344CB8AC3E}">
-        <p14:creationId xmlns:p14="http://schemas.microsoft.com/office/powerpoint/2010/main" val="842656631"/>
+        <p14:creationId xmlns:p14="http://schemas.microsoft.com/office/powerpoint/2010/main" val="3051142446"/>
       </p:ext>
     </p:extLst>
   </p:cSld>
@@ -5238,7 +5453,9 @@
     <p:bg>
       <p:bgPr>
         <a:solidFill>
-          <a:schemeClr val="accent1"/>
+          <a:schemeClr val="accent5">
+            <a:lumMod val="50000"/>
+          </a:schemeClr>
         </a:solidFill>
         <a:effectLst/>
       </p:bgPr>
@@ -5248,7 +5465,7 @@
         <p:cNvPr id="1" name="">
           <a:extLst>
             <a:ext uri="{FF2B5EF4-FFF2-40B4-BE49-F238E27FC236}">
-              <a16:creationId xmlns:a16="http://schemas.microsoft.com/office/drawing/2014/main" id="{7376500C-6117-479E-52F8-FE4E4E7B4BD1}"/>
+              <a16:creationId xmlns:a16="http://schemas.microsoft.com/office/drawing/2014/main" id="{FC5F4357-2370-385D-0B57-33EF9E113A9A}"/>
             </a:ext>
           </a:extLst>
         </p:cNvPr>
@@ -5268,7 +5485,7 @@
           <p:cNvPr id="3" name="Subtitle 2">
             <a:extLst>
               <a:ext uri="{FF2B5EF4-FFF2-40B4-BE49-F238E27FC236}">
-                <a16:creationId xmlns:a16="http://schemas.microsoft.com/office/drawing/2014/main" id="{ED5B0D5D-78C6-1574-4009-1E68CC34F55F}"/>
+                <a16:creationId xmlns:a16="http://schemas.microsoft.com/office/drawing/2014/main" id="{00EDD212-770A-54CB-55F6-5B869B15EA4F}"/>
               </a:ext>
             </a:extLst>
           </p:cNvPr>
@@ -5291,7 +5508,8 @@
           </a:bodyPr>
           <a:lstStyle/>
           <a:p>
-            <a:endParaRPr lang="en-US" sz="4400" dirty="0">
+            <a:pPr algn="l"/>
+            <a:endParaRPr lang="en-US" sz="3600" dirty="0">
               <a:solidFill>
                 <a:schemeClr val="bg1"/>
               </a:solidFill>
@@ -5300,65 +5518,63 @@
             </a:endParaRPr>
           </a:p>
           <a:p>
-            <a:endParaRPr lang="en-US" sz="4400" dirty="0">
-              <a:solidFill>
-                <a:schemeClr val="bg1"/>
-              </a:solidFill>
-              <a:latin typeface="Avenir Medium" panose="02000503020000020003" pitchFamily="2" charset="0"/>
-              <a:ea typeface="Bodoni Ornaments" pitchFamily="2" charset="0"/>
-            </a:endParaRPr>
-          </a:p>
-          <a:p>
-            <a:r>
-              <a:rPr lang="en-US" sz="4400" dirty="0">
+            <a:pPr algn="l"/>
+            <a:r>
+              <a:rPr lang="en-US" sz="3600" dirty="0">
+                <a:solidFill>
+                  <a:srgbClr val="FFFF00"/>
+                </a:solidFill>
+                <a:latin typeface="Avenir Medium" panose="02000503020000020003" pitchFamily="2" charset="0"/>
+                <a:ea typeface="Bodoni Ornaments" pitchFamily="2" charset="0"/>
+              </a:rPr>
+              <a:t>         C                D       Em</a:t>
+            </a:r>
+          </a:p>
+          <a:p>
+            <a:pPr algn="l"/>
+            <a:r>
+              <a:rPr lang="en-US" sz="3600" dirty="0">
                 <a:solidFill>
                   <a:schemeClr val="bg1"/>
                 </a:solidFill>
                 <a:latin typeface="Avenir Medium" panose="02000503020000020003" pitchFamily="2" charset="0"/>
                 <a:ea typeface="Bodoni Ornaments" pitchFamily="2" charset="0"/>
               </a:rPr>
-              <a:t>Then came the morning </a:t>
-            </a:r>
-          </a:p>
-          <a:p>
-            <a:r>
-              <a:rPr lang="en-US" sz="4400" dirty="0">
+              <a:t>Jesus Christ, my living hope</a:t>
+            </a:r>
+          </a:p>
+          <a:p>
+            <a:pPr algn="l"/>
+            <a:r>
+              <a:rPr lang="en-US" sz="3600" dirty="0">
+                <a:solidFill>
+                  <a:srgbClr val="FFFF00"/>
+                </a:solidFill>
+                <a:latin typeface="Avenir Medium" panose="02000503020000020003" pitchFamily="2" charset="0"/>
+                <a:ea typeface="Bodoni Ornaments" pitchFamily="2" charset="0"/>
+              </a:rPr>
+              <a:t>                      C         D       G</a:t>
+            </a:r>
+          </a:p>
+          <a:p>
+            <a:pPr algn="l"/>
+            <a:r>
+              <a:rPr lang="en-US" sz="3600" dirty="0">
                 <a:solidFill>
                   <a:schemeClr val="bg1"/>
                 </a:solidFill>
                 <a:latin typeface="Avenir Medium" panose="02000503020000020003" pitchFamily="2" charset="0"/>
                 <a:ea typeface="Bodoni Ornaments" pitchFamily="2" charset="0"/>
               </a:rPr>
-              <a:t>that sealed the promise</a:t>
-            </a:r>
-          </a:p>
-          <a:p>
-            <a:r>
-              <a:rPr lang="en-US" sz="4400" dirty="0">
-                <a:solidFill>
-                  <a:schemeClr val="bg1"/>
-                </a:solidFill>
-                <a:latin typeface="Avenir Medium" panose="02000503020000020003" pitchFamily="2" charset="0"/>
-                <a:ea typeface="Bodoni Ornaments" pitchFamily="2" charset="0"/>
-              </a:rPr>
-              <a:t>Your buried body began to breathe</a:t>
-            </a:r>
-          </a:p>
-          <a:p>
-            <a:endParaRPr lang="en-US" sz="4400" dirty="0">
-              <a:solidFill>
-                <a:schemeClr val="bg1"/>
-              </a:solidFill>
-              <a:latin typeface="Avenir Medium" panose="02000503020000020003" pitchFamily="2" charset="0"/>
-              <a:ea typeface="Bodoni Ornaments" pitchFamily="2" charset="0"/>
-            </a:endParaRPr>
+              <a:t>Oh God, You are my living hope</a:t>
+            </a:r>
           </a:p>
         </p:txBody>
       </p:sp>
     </p:spTree>
     <p:extLst>
       <p:ext uri="{BB962C8B-B14F-4D97-AF65-F5344CB8AC3E}">
-        <p14:creationId xmlns:p14="http://schemas.microsoft.com/office/powerpoint/2010/main" val="2340880349"/>
+        <p14:creationId xmlns:p14="http://schemas.microsoft.com/office/powerpoint/2010/main" val="4033732862"/>
       </p:ext>
     </p:extLst>
   </p:cSld>
